--- a/curriculum/M01/W04/L02/slides.pptx
+++ b/curriculum/M01/W04/L02/slides.pptx
@@ -4813,11 +4813,40 @@
                 <a:ea typeface="Malgun Gothic"/>
                 <a:cs typeface="Malgun Gothic"/>
               </a:rPr>
-              <a:t> 세 영양소마다 완전한 산화 경로를 따로 갖출 필요가 없다. 공통 구간 하나로 충분하다. 2. </a:t>
-            </a:r>
+              <a:t> 세 영양소마다 완전한 산화 경로를 따로 갖출 필요가 없다. 공통 구간 하나로 충분하다.</a:t>
+            </a:r>
+          </a:p>
+          <a:p>
+            <a:pPr>
+              <a:spcAft>
+                <a:spcPts val="900"/>
+              </a:spcAft>
+            </a:pPr>
             <a:r>
               <a:rPr sz="1400" b="1" i="0">
                 <a:solidFill>
+                  <a:srgbClr val="F2B705"/>
+                </a:solidFill>
+                <a:latin typeface="Malgun Gothic"/>
+                <a:ea typeface="Malgun Gothic"/>
+                <a:cs typeface="Malgun Gothic"/>
+              </a:rPr>
+              <a:t>•  </a:t>
+            </a:r>
+            <a:r>
+              <a:rPr sz="1400" b="0" i="0">
+                <a:solidFill>
+                  <a:srgbClr val="11202B"/>
+                </a:solidFill>
+                <a:latin typeface="Malgun Gothic"/>
+                <a:ea typeface="Malgun Gothic"/>
+                <a:cs typeface="Malgun Gothic"/>
+              </a:rPr>
+              <a:t>2. </a:t>
+            </a:r>
+            <a:r>
+              <a:rPr sz="1400" b="1" i="0">
+                <a:solidFill>
                   <a:srgbClr val="11202B"/>
                 </a:solidFill>
                 <a:latin typeface="Malgun Gothic"/>
@@ -4835,7 +4864,36 @@
                 <a:ea typeface="Malgun Gothic"/>
                 <a:cs typeface="Malgun Gothic"/>
               </a:rPr>
-              <a:t> 들어오는 연료의 종류가 바뀌어도 같은 기계가 처리한다. 식사 내용이 날마다 달라도 세포가 대응할 수 있는 이유다. 3. </a:t>
+              <a:t> 들어오는 연료의 종류가 바뀌어도 같은 기계가 처리한다. 식사 내용이 날마다 달라도 세포가 대응할 수 있는 이유다.</a:t>
+            </a:r>
+          </a:p>
+          <a:p>
+            <a:pPr>
+              <a:spcAft>
+                <a:spcPts val="900"/>
+              </a:spcAft>
+            </a:pPr>
+            <a:r>
+              <a:rPr sz="1400" b="1" i="0">
+                <a:solidFill>
+                  <a:srgbClr val="F2B705"/>
+                </a:solidFill>
+                <a:latin typeface="Malgun Gothic"/>
+                <a:ea typeface="Malgun Gothic"/>
+                <a:cs typeface="Malgun Gothic"/>
+              </a:rPr>
+              <a:t>•  </a:t>
+            </a:r>
+            <a:r>
+              <a:rPr sz="1400" b="0" i="0">
+                <a:solidFill>
+                  <a:srgbClr val="11202B"/>
+                </a:solidFill>
+                <a:latin typeface="Malgun Gothic"/>
+                <a:ea typeface="Malgun Gothic"/>
+                <a:cs typeface="Malgun Gothic"/>
+              </a:rPr>
+              <a:t>3. </a:t>
             </a:r>
             <a:r>
               <a:rPr sz="1400" b="1" i="0">
@@ -5969,11 +6027,40 @@
                 <a:ea typeface="Malgun Gothic"/>
                 <a:cs typeface="Malgun Gothic"/>
               </a:rPr>
-              <a:t>다. 2. </a:t>
-            </a:r>
+              <a:t>다.</a:t>
+            </a:r>
+          </a:p>
+          <a:p>
+            <a:pPr>
+              <a:spcAft>
+                <a:spcPts val="900"/>
+              </a:spcAft>
+            </a:pPr>
             <a:r>
               <a:rPr sz="1400" b="1" i="0">
                 <a:solidFill>
+                  <a:srgbClr val="F2B705"/>
+                </a:solidFill>
+                <a:latin typeface="Malgun Gothic"/>
+                <a:ea typeface="Malgun Gothic"/>
+                <a:cs typeface="Malgun Gothic"/>
+              </a:rPr>
+              <a:t>•  </a:t>
+            </a:r>
+            <a:r>
+              <a:rPr sz="1400" b="0" i="0">
+                <a:solidFill>
+                  <a:srgbClr val="11202B"/>
+                </a:solidFill>
+                <a:latin typeface="Malgun Gothic"/>
+                <a:ea typeface="Malgun Gothic"/>
+                <a:cs typeface="Malgun Gothic"/>
+              </a:rPr>
+              <a:t>2. </a:t>
+            </a:r>
+            <a:r>
+              <a:rPr sz="1400" b="1" i="0">
+                <a:solidFill>
                   <a:srgbClr val="11202B"/>
                 </a:solidFill>
                 <a:latin typeface="Malgun Gothic"/>
@@ -5991,11 +6078,40 @@
                 <a:ea typeface="Malgun Gothic"/>
                 <a:cs typeface="Malgun Gothic"/>
               </a:rPr>
-              <a:t>: 간과 근육에서 저장 형태로 쌓는다. 간의 glycogen은 혈당 유지에 쓰이고, 근육의 glycogen은 그 근육 자신만 쓴다. 근육에는 glucose-6-phosphatase가 없어 포도당을 혈액으로 내보낼 수 없기 때문이다. 3. </a:t>
-            </a:r>
+              <a:t>: 간과 근육에서 저장 형태로 쌓는다. 간의 glycogen은 혈당 유지에 쓰이고, 근육의 glycogen은 그 근육 자신만 쓴다. 근육에는 glucose-6-phosphatase가 없어 포도당을 혈액으로 내보낼 수 없기 때문이다.</a:t>
+            </a:r>
+          </a:p>
+          <a:p>
+            <a:pPr>
+              <a:spcAft>
+                <a:spcPts val="900"/>
+              </a:spcAft>
+            </a:pPr>
             <a:r>
               <a:rPr sz="1400" b="1" i="0">
                 <a:solidFill>
+                  <a:srgbClr val="F2B705"/>
+                </a:solidFill>
+                <a:latin typeface="Malgun Gothic"/>
+                <a:ea typeface="Malgun Gothic"/>
+                <a:cs typeface="Malgun Gothic"/>
+              </a:rPr>
+              <a:t>•  </a:t>
+            </a:r>
+            <a:r>
+              <a:rPr sz="1400" b="0" i="0">
+                <a:solidFill>
+                  <a:srgbClr val="11202B"/>
+                </a:solidFill>
+                <a:latin typeface="Malgun Gothic"/>
+                <a:ea typeface="Malgun Gothic"/>
+                <a:cs typeface="Malgun Gothic"/>
+              </a:rPr>
+              <a:t>3. </a:t>
+            </a:r>
+            <a:r>
+              <a:rPr sz="1400" b="1" i="0">
+                <a:solidFill>
                   <a:srgbClr val="11202B"/>
                 </a:solidFill>
                 <a:latin typeface="Malgun Gothic"/>
@@ -6057,7 +6173,36 @@
                 <a:ea typeface="Malgun Gothic"/>
                 <a:cs typeface="Malgun Gothic"/>
               </a:rPr>
-              <a:t>를 만든다. 지방 합성이 활발한 조직과 적혈구에서 중요하다. 4. </a:t>
+              <a:t>를 만든다. 지방 합성이 활발한 조직과 적혈구에서 중요하다.</a:t>
+            </a:r>
+          </a:p>
+          <a:p>
+            <a:pPr>
+              <a:spcAft>
+                <a:spcPts val="900"/>
+              </a:spcAft>
+            </a:pPr>
+            <a:r>
+              <a:rPr sz="1400" b="1" i="0">
+                <a:solidFill>
+                  <a:srgbClr val="F2B705"/>
+                </a:solidFill>
+                <a:latin typeface="Malgun Gothic"/>
+                <a:ea typeface="Malgun Gothic"/>
+                <a:cs typeface="Malgun Gothic"/>
+              </a:rPr>
+              <a:t>•  </a:t>
+            </a:r>
+            <a:r>
+              <a:rPr sz="1400" b="0" i="0">
+                <a:solidFill>
+                  <a:srgbClr val="11202B"/>
+                </a:solidFill>
+                <a:latin typeface="Malgun Gothic"/>
+                <a:ea typeface="Malgun Gothic"/>
+                <a:cs typeface="Malgun Gothic"/>
+              </a:rPr>
+              <a:t>4. </a:t>
             </a:r>
             <a:r>
               <a:rPr sz="1400" b="1" i="0">

--- a/curriculum/M01/W04/L02/slides.pptx
+++ b/curriculum/M01/W04/L02/slides.pptx
@@ -13495,7 +13495,7 @@
                 <a:ea typeface="Malgun Gothic"/>
                 <a:cs typeface="Malgun Gothic"/>
               </a:rPr>
-              <a:t>M01-W01-L03 소화계 요약 — 영양소의 소화와 흡수, 간의 기능</a:t>
+              <a:t>M01-W01-L03 소화계 요약: 소화·흡수·간의 역할 — 영양소의 소화와 흡수, 간의 기능</a:t>
             </a:r>
           </a:p>
           <a:p>
@@ -13524,7 +13524,7 @@
                 <a:ea typeface="Malgun Gothic"/>
                 <a:cs typeface="Malgun Gothic"/>
               </a:rPr>
-              <a:t>M01-W02-L02 내분비계 요약 — insulin과 glucagon, 호르몬의 작용 방식</a:t>
+              <a:t>M01-W02-L02 내분비계 요약: 호르몬과 되먹임 — insulin과 glucagon, 호르몬의 작용 방식</a:t>
             </a:r>
           </a:p>
           <a:p>

--- a/curriculum/M01/W04/L02/slides.pptx
+++ b/curriculum/M01/W04/L02/slides.pptx
@@ -4474,6 +4474,57 @@
                 <a:ea typeface="Malgun Gothic"/>
                 <a:cs typeface="Malgun Gothic"/>
               </a:rPr>
+              <a:t>앞의 두 절에서 에너지를 담는 형태(ATP)와 꺼내는 방식(전자 이동)을 세웠다. 이제 </a:t>
+            </a:r>
+            <a:r>
+              <a:rPr sz="1400" b="1" i="0">
+                <a:solidFill>
+                  <a:srgbClr val="11202B"/>
+                </a:solidFill>
+                <a:latin typeface="Malgun Gothic"/>
+                <a:ea typeface="Malgun Gothic"/>
+                <a:cs typeface="Malgun Gothic"/>
+              </a:rPr>
+              <a:t>무엇에서</a:t>
+            </a:r>
+            <a:r>
+              <a:rPr sz="1400" b="0" i="0">
+                <a:solidFill>
+                  <a:srgbClr val="11202B"/>
+                </a:solidFill>
+                <a:latin typeface="Malgun Gothic"/>
+                <a:ea typeface="Malgun Gothic"/>
+                <a:cs typeface="Malgun Gothic"/>
+              </a:rPr>
+              <a:t> 꺼내는지로 넘어간다. 우리가 먹는 것은 탄수화물, 지방, 단백질 세 가지이고 구조가 전혀 다르다. 그런데 그 분해 경로를 그려 보면 한 지점으로 모인다. 이 수렴이 대사를 외우지 않고 이해하게 해 주는 열쇠다.</a:t>
+            </a:r>
+          </a:p>
+          <a:p>
+            <a:pPr>
+              <a:spcAft>
+                <a:spcPts val="900"/>
+              </a:spcAft>
+            </a:pPr>
+            <a:r>
+              <a:rPr sz="1400" b="1" i="0">
+                <a:solidFill>
+                  <a:srgbClr val="F2B705"/>
+                </a:solidFill>
+                <a:latin typeface="Malgun Gothic"/>
+                <a:ea typeface="Malgun Gothic"/>
+                <a:cs typeface="Malgun Gothic"/>
+              </a:rPr>
+              <a:t>•  </a:t>
+            </a:r>
+            <a:r>
+              <a:rPr sz="1400" b="0" i="0">
+                <a:solidFill>
+                  <a:srgbClr val="11202B"/>
+                </a:solidFill>
+                <a:latin typeface="Malgun Gothic"/>
+                <a:ea typeface="Malgun Gothic"/>
+                <a:cs typeface="Malgun Gothic"/>
+              </a:rPr>
               <a:t>탄수화물, 지방, 단백질은 구조가 전혀 다르지만 분해 경로는 </a:t>
             </a:r>
             <a:r>
@@ -5932,6 +5983,57 @@
                 <a:ea typeface="Malgun Gothic"/>
                 <a:cs typeface="Malgun Gothic"/>
               </a:rPr>
+              <a:t>앞 절의 지도에서 세 영양소를 한눈에 보았다. 이제 각각으로 내려간다. 포도당부터 보는 이유는 몸이 가장 먼저 쓰는 연료이면서, 동시에 </a:t>
+            </a:r>
+            <a:r>
+              <a:rPr sz="1400" b="1" i="0">
+                <a:solidFill>
+                  <a:srgbClr val="11202B"/>
+                </a:solidFill>
+                <a:latin typeface="Malgun Gothic"/>
+                <a:ea typeface="Malgun Gothic"/>
+                <a:cs typeface="Malgun Gothic"/>
+              </a:rPr>
+              <a:t>쓰는 길이 하나가 아니라는 점</a:t>
+            </a:r>
+            <a:r>
+              <a:rPr sz="1400" b="0" i="0">
+                <a:solidFill>
+                  <a:srgbClr val="11202B"/>
+                </a:solidFill>
+                <a:latin typeface="Malgun Gothic"/>
+                <a:ea typeface="Malgun Gothic"/>
+                <a:cs typeface="Malgun Gothic"/>
+              </a:rPr>
+              <a:t>을 가장 잘 보여 주기 때문이다. 같은 분자가 상황에 따라 서로 다른 길로 가는 모습이 여기서 처음 나타난다.</a:t>
+            </a:r>
+          </a:p>
+          <a:p>
+            <a:pPr>
+              <a:spcAft>
+                <a:spcPts val="900"/>
+              </a:spcAft>
+            </a:pPr>
+            <a:r>
+              <a:rPr sz="1400" b="1" i="0">
+                <a:solidFill>
+                  <a:srgbClr val="F2B705"/>
+                </a:solidFill>
+                <a:latin typeface="Malgun Gothic"/>
+                <a:ea typeface="Malgun Gothic"/>
+                <a:cs typeface="Malgun Gothic"/>
+              </a:rPr>
+              <a:t>•  </a:t>
+            </a:r>
+            <a:r>
+              <a:rPr sz="1400" b="0" i="0">
+                <a:solidFill>
+                  <a:srgbClr val="11202B"/>
+                </a:solidFill>
+                <a:latin typeface="Malgun Gothic"/>
+                <a:ea typeface="Malgun Gothic"/>
+                <a:cs typeface="Malgun Gothic"/>
+              </a:rPr>
               <a:t>세포로 들어온 포도당은 바로 인산화되어 glucose-6-phosphate가 된다. 인산이 붙으면 막을 통과하지 못하므로 </a:t>
             </a:r>
             <a:r>
@@ -6651,6 +6753,35 @@
                 <a:ea typeface="Malgun Gothic"/>
                 <a:cs typeface="Malgun Gothic"/>
               </a:rPr>
+              <a:t>포도당은 쓰기 편하지만 많이 저장할 수 없다. 그런데 사람은 며칠을 굶어도 버틴다. 저장은 다른 형태가 맡고 있다는 뜻이다. 이 절은 왜 하필 지방이 그 역할을 맡게 되었는지를, 외워야 할 사실이 아니라 화학 구조에서 따라 나오는 결론으로 다룬다.</a:t>
+            </a:r>
+          </a:p>
+          <a:p>
+            <a:pPr>
+              <a:spcAft>
+                <a:spcPts val="900"/>
+              </a:spcAft>
+            </a:pPr>
+            <a:r>
+              <a:rPr sz="1400" b="1" i="0">
+                <a:solidFill>
+                  <a:srgbClr val="F2B705"/>
+                </a:solidFill>
+                <a:latin typeface="Malgun Gothic"/>
+                <a:ea typeface="Malgun Gothic"/>
+                <a:cs typeface="Malgun Gothic"/>
+              </a:rPr>
+              <a:t>•  </a:t>
+            </a:r>
+            <a:r>
+              <a:rPr sz="1400" b="0" i="0">
+                <a:solidFill>
+                  <a:srgbClr val="11202B"/>
+                </a:solidFill>
+                <a:latin typeface="Malgun Gothic"/>
+                <a:ea typeface="Malgun Gothic"/>
+                <a:cs typeface="Malgun Gothic"/>
+              </a:rPr>
               <a:t>지방이 장기 저장 형태로 선택된 이유는 두 가지이며, 둘 다 화학 구조에서 나온다.</a:t>
             </a:r>
           </a:p>
@@ -7235,6 +7366,57 @@
                 <a:ea typeface="Malgun Gothic"/>
                 <a:cs typeface="Malgun Gothic"/>
               </a:rPr>
+              <a:t>탄수화물과 지방은 저장 형태가 있었다. 세 번째 영양소인 단백질에는 그런 것이 없다. 그래서 단백질을 연료로 쓴다는 것은 다른 두 영양소와 전혀 다른 의미를 갖는다. 또 하나 다른 점은 </a:t>
+            </a:r>
+            <a:r>
+              <a:rPr sz="1400" b="1" i="0">
+                <a:solidFill>
+                  <a:srgbClr val="11202B"/>
+                </a:solidFill>
+                <a:latin typeface="Malgun Gothic"/>
+                <a:ea typeface="Malgun Gothic"/>
+                <a:cs typeface="Malgun Gothic"/>
+              </a:rPr>
+              <a:t>질소</a:t>
+            </a:r>
+            <a:r>
+              <a:rPr sz="1400" b="0" i="0">
+                <a:solidFill>
+                  <a:srgbClr val="11202B"/>
+                </a:solidFill>
+                <a:latin typeface="Malgun Gothic"/>
+                <a:ea typeface="Malgun Gothic"/>
+                <a:cs typeface="Malgun Gothic"/>
+              </a:rPr>
+              <a:t>다. 태워서 없앨 수 없는 원소가 들어 있다는 사실이 이 절의 구조를 정한다.</a:t>
+            </a:r>
+          </a:p>
+          <a:p>
+            <a:pPr>
+              <a:spcAft>
+                <a:spcPts val="900"/>
+              </a:spcAft>
+            </a:pPr>
+            <a:r>
+              <a:rPr sz="1400" b="1" i="0">
+                <a:solidFill>
+                  <a:srgbClr val="F2B705"/>
+                </a:solidFill>
+                <a:latin typeface="Malgun Gothic"/>
+                <a:ea typeface="Malgun Gothic"/>
+                <a:cs typeface="Malgun Gothic"/>
+              </a:rPr>
+              <a:t>•  </a:t>
+            </a:r>
+            <a:r>
+              <a:rPr sz="1400" b="0" i="0">
+                <a:solidFill>
+                  <a:srgbClr val="11202B"/>
+                </a:solidFill>
+                <a:latin typeface="Malgun Gothic"/>
+                <a:ea typeface="Malgun Gothic"/>
+                <a:cs typeface="Malgun Gothic"/>
+              </a:rPr>
               <a:t>단백질은 저장 형태가 아니다. 모든 단백질은 구조나 기능을 담당하고 있으므로, 단백질을 분해해 에너지로 쓰는 것은 </a:t>
             </a:r>
             <a:r>
@@ -8154,7 +8336,7 @@
               </a:spcAft>
             </a:pPr>
             <a:r>
-              <a:rPr sz="2000" b="1" i="0">
+              <a:rPr sz="1800" b="1" i="0">
                 <a:solidFill>
                   <a:srgbClr val="F2B705"/>
                 </a:solidFill>
@@ -8165,37 +8347,37 @@
               <a:t>•  </a:t>
             </a:r>
             <a:r>
-              <a:rPr sz="2000" b="0" i="0">
-                <a:solidFill>
-                  <a:srgbClr val="11202B"/>
-                </a:solidFill>
-                <a:latin typeface="Malgun Gothic"/>
-                <a:ea typeface="Malgun Gothic"/>
-                <a:cs typeface="Malgun Gothic"/>
-              </a:rPr>
-              <a:t>대사를 이해하는 가장 좋은 틀은 </a:t>
-            </a:r>
-            <a:r>
-              <a:rPr sz="2000" b="1" i="0">
-                <a:solidFill>
-                  <a:srgbClr val="11202B"/>
-                </a:solidFill>
-                <a:latin typeface="Malgun Gothic"/>
-                <a:ea typeface="Malgun Gothic"/>
-                <a:cs typeface="Malgun Gothic"/>
-              </a:rPr>
-              <a:t>시간에 따른 상태 변화</a:t>
-            </a:r>
-            <a:r>
-              <a:rPr sz="2000" b="0" i="0">
-                <a:solidFill>
-                  <a:srgbClr val="11202B"/>
-                </a:solidFill>
-                <a:latin typeface="Malgun Gothic"/>
-                <a:ea typeface="Malgun Gothic"/>
-                <a:cs typeface="Malgun Gothic"/>
-              </a:rPr>
-              <a:t>다. 같은 기관이 상태에 따라 정반대의 일을 한다.</a:t>
+              <a:rPr sz="1800" b="0" i="0">
+                <a:solidFill>
+                  <a:srgbClr val="11202B"/>
+                </a:solidFill>
+                <a:latin typeface="Malgun Gothic"/>
+                <a:ea typeface="Malgun Gothic"/>
+                <a:cs typeface="Malgun Gothic"/>
+              </a:rPr>
+              <a:t>앞의 세 절에서 영양소를 하나씩 따로 보았다. 그런데 몸에서는 셋이 동시에 존재하고, 어느 것을 쓸지는 그때의 상황이 정한다. 식사 직후와 하루를 굶은 뒤는 같은 간이라도 정반대의 일을 한다. 이 절은 영양소별 시선을 </a:t>
+            </a:r>
+            <a:r>
+              <a:rPr sz="1800" b="1" i="0">
+                <a:solidFill>
+                  <a:srgbClr val="11202B"/>
+                </a:solidFill>
+                <a:latin typeface="Malgun Gothic"/>
+                <a:ea typeface="Malgun Gothic"/>
+                <a:cs typeface="Malgun Gothic"/>
+              </a:rPr>
+              <a:t>시간별 시선</a:t>
+            </a:r>
+            <a:r>
+              <a:rPr sz="1800" b="0" i="0">
+                <a:solidFill>
+                  <a:srgbClr val="11202B"/>
+                </a:solidFill>
+                <a:latin typeface="Malgun Gothic"/>
+                <a:ea typeface="Malgun Gothic"/>
+                <a:cs typeface="Malgun Gothic"/>
+              </a:rPr>
+              <a:t>으로 바꾸어 다시 본다.</a:t>
             </a:r>
           </a:p>
           <a:p>
@@ -8205,7 +8387,7 @@
               </a:spcAft>
             </a:pPr>
             <a:r>
-              <a:rPr sz="2000" b="1" i="0">
+              <a:rPr sz="1800" b="1" i="0">
                 <a:solidFill>
                   <a:srgbClr val="F2B705"/>
                 </a:solidFill>
@@ -8216,7 +8398,58 @@
               <a:t>•  </a:t>
             </a:r>
             <a:r>
-              <a:rPr sz="2000" b="1" i="0">
+              <a:rPr sz="1800" b="0" i="0">
+                <a:solidFill>
+                  <a:srgbClr val="11202B"/>
+                </a:solidFill>
+                <a:latin typeface="Malgun Gothic"/>
+                <a:ea typeface="Malgun Gothic"/>
+                <a:cs typeface="Malgun Gothic"/>
+              </a:rPr>
+              <a:t>대사를 이해하는 가장 좋은 틀은 </a:t>
+            </a:r>
+            <a:r>
+              <a:rPr sz="1800" b="1" i="0">
+                <a:solidFill>
+                  <a:srgbClr val="11202B"/>
+                </a:solidFill>
+                <a:latin typeface="Malgun Gothic"/>
+                <a:ea typeface="Malgun Gothic"/>
+                <a:cs typeface="Malgun Gothic"/>
+              </a:rPr>
+              <a:t>시간에 따른 상태 변화</a:t>
+            </a:r>
+            <a:r>
+              <a:rPr sz="1800" b="0" i="0">
+                <a:solidFill>
+                  <a:srgbClr val="11202B"/>
+                </a:solidFill>
+                <a:latin typeface="Malgun Gothic"/>
+                <a:ea typeface="Malgun Gothic"/>
+                <a:cs typeface="Malgun Gothic"/>
+              </a:rPr>
+              <a:t>다. 같은 기관이 상태에 따라 정반대의 일을 한다.</a:t>
+            </a:r>
+          </a:p>
+          <a:p>
+            <a:pPr>
+              <a:spcAft>
+                <a:spcPts val="900"/>
+              </a:spcAft>
+            </a:pPr>
+            <a:r>
+              <a:rPr sz="1800" b="1" i="0">
+                <a:solidFill>
+                  <a:srgbClr val="F2B705"/>
+                </a:solidFill>
+                <a:latin typeface="Malgun Gothic"/>
+                <a:ea typeface="Malgun Gothic"/>
+                <a:cs typeface="Malgun Gothic"/>
+              </a:rPr>
+              <a:t>•  </a:t>
+            </a:r>
+            <a:r>
+              <a:rPr sz="1800" b="1" i="0">
                 <a:solidFill>
                   <a:srgbClr val="11202B"/>
                 </a:solidFill>
@@ -8227,7 +8460,7 @@
               <a:t>섭식 상태(식후 2~4시간).</a:t>
             </a:r>
             <a:r>
-              <a:rPr sz="2000" b="0" i="0">
+              <a:rPr sz="1800" b="0" i="0">
                 <a:solidFill>
                   <a:srgbClr val="11202B"/>
                 </a:solidFill>
@@ -8238,7 +8471,7 @@
               <a:t> 혈당이 오르고 insulin이 분비된다. 전체 방향은 </a:t>
             </a:r>
             <a:r>
-              <a:rPr sz="2000" b="1" i="0">
+              <a:rPr sz="1800" b="1" i="0">
                 <a:solidFill>
                   <a:srgbClr val="11202B"/>
                 </a:solidFill>
@@ -8249,7 +8482,7 @@
               <a:t>저장</a:t>
             </a:r>
             <a:r>
-              <a:rPr sz="2000" b="0" i="0">
+              <a:rPr sz="1800" b="0" i="0">
                 <a:solidFill>
                   <a:srgbClr val="11202B"/>
                 </a:solidFill>
@@ -11161,7 +11394,7 @@
               </a:spcAft>
             </a:pPr>
             <a:r>
-              <a:rPr sz="1600" b="1" i="0">
+              <a:rPr sz="1400" b="1" i="0">
                 <a:solidFill>
                   <a:srgbClr val="F2B705"/>
                 </a:solidFill>
@@ -11172,37 +11405,37 @@
               <a:t>•  </a:t>
             </a:r>
             <a:r>
-              <a:rPr sz="1600" b="0" i="0">
-                <a:solidFill>
-                  <a:srgbClr val="11202B"/>
-                </a:solidFill>
-                <a:latin typeface="Malgun Gothic"/>
-                <a:ea typeface="Malgun Gothic"/>
-                <a:cs typeface="Malgun Gothic"/>
-              </a:rPr>
-              <a:t>8절의 전환을 실제로 일으키는 것은 호르몬이다. 핵심은 </a:t>
-            </a:r>
-            <a:r>
-              <a:rPr sz="1600" b="1" i="0">
-                <a:solidFill>
-                  <a:srgbClr val="11202B"/>
-                </a:solidFill>
-                <a:latin typeface="Malgun Gothic"/>
-                <a:ea typeface="Malgun Gothic"/>
-                <a:cs typeface="Malgun Gothic"/>
-              </a:rPr>
-              <a:t>절대 농도가 아니라 비율</a:t>
-            </a:r>
-            <a:r>
-              <a:rPr sz="1600" b="0" i="0">
-                <a:solidFill>
-                  <a:srgbClr val="11202B"/>
-                </a:solidFill>
-                <a:latin typeface="Malgun Gothic"/>
-                <a:ea typeface="Malgun Gothic"/>
-                <a:cs typeface="Malgun Gothic"/>
-              </a:rPr>
-              <a:t>이다.</a:t>
+              <a:rPr sz="1400" b="0" i="0">
+                <a:solidFill>
+                  <a:srgbClr val="11202B"/>
+                </a:solidFill>
+                <a:latin typeface="Malgun Gothic"/>
+                <a:ea typeface="Malgun Gothic"/>
+                <a:cs typeface="Malgun Gothic"/>
+              </a:rPr>
+              <a:t>앞 절에서 몸이 상태에 따라 정반대 방향으로 대사를 돌린다는 것을 보았다. 그러면 </a:t>
+            </a:r>
+            <a:r>
+              <a:rPr sz="1400" b="1" i="0">
+                <a:solidFill>
+                  <a:srgbClr val="11202B"/>
+                </a:solidFill>
+                <a:latin typeface="Malgun Gothic"/>
+                <a:ea typeface="Malgun Gothic"/>
+                <a:cs typeface="Malgun Gothic"/>
+              </a:rPr>
+              <a:t>무엇이 그 전환을 일으키는가.</a:t>
+            </a:r>
+            <a:r>
+              <a:rPr sz="1400" b="0" i="0">
+                <a:solidFill>
+                  <a:srgbClr val="11202B"/>
+                </a:solidFill>
+                <a:latin typeface="Malgun Gothic"/>
+                <a:ea typeface="Malgun Gothic"/>
+                <a:cs typeface="Malgun Gothic"/>
+              </a:rPr>
+              <a:t> 세포 하나하나가 알아서 판단할 수는 없으므로, 몸 전체에 같은 신호를 보내는 장치가 있어야 한다.</a:t>
             </a:r>
           </a:p>
           <a:p>
@@ -11212,7 +11445,7 @@
               </a:spcAft>
             </a:pPr>
             <a:r>
-              <a:rPr sz="1600" b="1" i="0">
+              <a:rPr sz="1400" b="1" i="0">
                 <a:solidFill>
                   <a:srgbClr val="F2B705"/>
                 </a:solidFill>
@@ -11223,48 +11456,37 @@
               <a:t>•  </a:t>
             </a:r>
             <a:r>
-              <a:rPr sz="1600" b="1" i="0">
-                <a:solidFill>
-                  <a:srgbClr val="11202B"/>
-                </a:solidFill>
-                <a:latin typeface="Malgun Gothic"/>
-                <a:ea typeface="Malgun Gothic"/>
-                <a:cs typeface="Malgun Gothic"/>
-              </a:rPr>
-              <a:t>Insulin.</a:t>
-            </a:r>
-            <a:r>
-              <a:rPr sz="1600" b="0" i="0">
-                <a:solidFill>
-                  <a:srgbClr val="11202B"/>
-                </a:solidFill>
-                <a:latin typeface="Malgun Gothic"/>
-                <a:ea typeface="Malgun Gothic"/>
-                <a:cs typeface="Malgun Gothic"/>
-              </a:rPr>
-              <a:t> 혈당이 오르면 췌장 β세포에서 분비된다. 신호는 "에너지가 남는다"이며, 작용의 방향은 전부 </a:t>
-            </a:r>
-            <a:r>
-              <a:rPr sz="1600" b="1" i="0">
-                <a:solidFill>
-                  <a:srgbClr val="11202B"/>
-                </a:solidFill>
-                <a:latin typeface="Malgun Gothic"/>
-                <a:ea typeface="Malgun Gothic"/>
-                <a:cs typeface="Malgun Gothic"/>
-              </a:rPr>
-              <a:t>저장과 합성</a:t>
-            </a:r>
-            <a:r>
-              <a:rPr sz="1600" b="0" i="0">
-                <a:solidFill>
-                  <a:srgbClr val="11202B"/>
-                </a:solidFill>
-                <a:latin typeface="Malgun Gothic"/>
-                <a:ea typeface="Malgun Gothic"/>
-                <a:cs typeface="Malgun Gothic"/>
-              </a:rPr>
-              <a:t>이다. 포도당 섭취를 늘리고, glycogen 합성을 켜고 분해를 끄며, 지방 합성을 켜고 분해를 끄고, 단백질 합성을 촉진한다.</a:t>
+              <a:rPr sz="1400" b="0" i="0">
+                <a:solidFill>
+                  <a:srgbClr val="11202B"/>
+                </a:solidFill>
+                <a:latin typeface="Malgun Gothic"/>
+                <a:ea typeface="Malgun Gothic"/>
+                <a:cs typeface="Malgun Gothic"/>
+              </a:rPr>
+              <a:t>8절의 전환을 실제로 일으키는 것은 호르몬이다. 핵심은 </a:t>
+            </a:r>
+            <a:r>
+              <a:rPr sz="1400" b="1" i="0">
+                <a:solidFill>
+                  <a:srgbClr val="11202B"/>
+                </a:solidFill>
+                <a:latin typeface="Malgun Gothic"/>
+                <a:ea typeface="Malgun Gothic"/>
+                <a:cs typeface="Malgun Gothic"/>
+              </a:rPr>
+              <a:t>절대 농도가 아니라 비율</a:t>
+            </a:r>
+            <a:r>
+              <a:rPr sz="1400" b="0" i="0">
+                <a:solidFill>
+                  <a:srgbClr val="11202B"/>
+                </a:solidFill>
+                <a:latin typeface="Malgun Gothic"/>
+                <a:ea typeface="Malgun Gothic"/>
+                <a:cs typeface="Malgun Gothic"/>
+              </a:rPr>
+              <a:t>이다.</a:t>
             </a:r>
           </a:p>
           <a:p>
@@ -11274,7 +11496,7 @@
               </a:spcAft>
             </a:pPr>
             <a:r>
-              <a:rPr sz="1600" b="1" i="0">
+              <a:rPr sz="1400" b="1" i="0">
                 <a:solidFill>
                   <a:srgbClr val="F2B705"/>
                 </a:solidFill>
@@ -11285,70 +11507,48 @@
               <a:t>•  </a:t>
             </a:r>
             <a:r>
-              <a:rPr sz="1600" b="1" i="0">
-                <a:solidFill>
-                  <a:srgbClr val="11202B"/>
-                </a:solidFill>
-                <a:latin typeface="Malgun Gothic"/>
-                <a:ea typeface="Malgun Gothic"/>
-                <a:cs typeface="Malgun Gothic"/>
-              </a:rPr>
-              <a:t>Glucagon.</a:t>
-            </a:r>
-            <a:r>
-              <a:rPr sz="1600" b="0" i="0">
-                <a:solidFill>
-                  <a:srgbClr val="11202B"/>
-                </a:solidFill>
-                <a:latin typeface="Malgun Gothic"/>
-                <a:ea typeface="Malgun Gothic"/>
-                <a:cs typeface="Malgun Gothic"/>
-              </a:rPr>
-              <a:t> 혈당이 떨어지면 α세포에서 분비된다. 신호는 "에너지가 모자란다"이며, 방향은 </a:t>
-            </a:r>
-            <a:r>
-              <a:rPr sz="1600" b="1" i="0">
-                <a:solidFill>
-                  <a:srgbClr val="11202B"/>
-                </a:solidFill>
-                <a:latin typeface="Malgun Gothic"/>
-                <a:ea typeface="Malgun Gothic"/>
-                <a:cs typeface="Malgun Gothic"/>
-              </a:rPr>
-              <a:t>동원</a:t>
-            </a:r>
-            <a:r>
-              <a:rPr sz="1600" b="0" i="0">
-                <a:solidFill>
-                  <a:srgbClr val="11202B"/>
-                </a:solidFill>
-                <a:latin typeface="Malgun Gothic"/>
-                <a:ea typeface="Malgun Gothic"/>
-                <a:cs typeface="Malgun Gothic"/>
-              </a:rPr>
-              <a:t>이다. 주 표적이 </a:t>
-            </a:r>
-            <a:r>
-              <a:rPr sz="1600" b="1" i="0">
-                <a:solidFill>
-                  <a:srgbClr val="11202B"/>
-                </a:solidFill>
-                <a:latin typeface="Malgun Gothic"/>
-                <a:ea typeface="Malgun Gothic"/>
-                <a:cs typeface="Malgun Gothic"/>
-              </a:rPr>
-              <a:t>간</a:t>
-            </a:r>
-            <a:r>
-              <a:rPr sz="1600" b="0" i="0">
-                <a:solidFill>
-                  <a:srgbClr val="11202B"/>
-                </a:solidFill>
-                <a:latin typeface="Malgun Gothic"/>
-                <a:ea typeface="Malgun Gothic"/>
-                <a:cs typeface="Malgun Gothic"/>
-              </a:rPr>
-              <a:t>이라는 점이 중요하다. Glycogen 분해와 gluconeogenesis를 켜고, ketone body 생산을 늘린다.</a:t>
+              <a:rPr sz="1400" b="1" i="0">
+                <a:solidFill>
+                  <a:srgbClr val="11202B"/>
+                </a:solidFill>
+                <a:latin typeface="Malgun Gothic"/>
+                <a:ea typeface="Malgun Gothic"/>
+                <a:cs typeface="Malgun Gothic"/>
+              </a:rPr>
+              <a:t>Insulin.</a:t>
+            </a:r>
+            <a:r>
+              <a:rPr sz="1400" b="0" i="0">
+                <a:solidFill>
+                  <a:srgbClr val="11202B"/>
+                </a:solidFill>
+                <a:latin typeface="Malgun Gothic"/>
+                <a:ea typeface="Malgun Gothic"/>
+                <a:cs typeface="Malgun Gothic"/>
+              </a:rPr>
+              <a:t> 혈당이 오르면 췌장 β세포에서 분비된다. 신호는 "에너지가 남는다"이며, 작용의 방향은 전부 </a:t>
+            </a:r>
+            <a:r>
+              <a:rPr sz="1400" b="1" i="0">
+                <a:solidFill>
+                  <a:srgbClr val="11202B"/>
+                </a:solidFill>
+                <a:latin typeface="Malgun Gothic"/>
+                <a:ea typeface="Malgun Gothic"/>
+                <a:cs typeface="Malgun Gothic"/>
+              </a:rPr>
+              <a:t>저장과 합성</a:t>
+            </a:r>
+            <a:r>
+              <a:rPr sz="1400" b="0" i="0">
+                <a:solidFill>
+                  <a:srgbClr val="11202B"/>
+                </a:solidFill>
+                <a:latin typeface="Malgun Gothic"/>
+                <a:ea typeface="Malgun Gothic"/>
+                <a:cs typeface="Malgun Gothic"/>
+              </a:rPr>
+              <a:t>이다. 포도당 섭취를 늘리고, glycogen 합성을 켜고 분해를 끄며, 지방 합성을 켜고 분해를 끄고, 단백질 합성을 촉진한다.</a:t>
             </a:r>
           </a:p>
           <a:p>
@@ -11358,7 +11558,7 @@
               </a:spcAft>
             </a:pPr>
             <a:r>
-              <a:rPr sz="1600" b="1" i="0">
+              <a:rPr sz="1400" b="1" i="0">
                 <a:solidFill>
                   <a:srgbClr val="F2B705"/>
                 </a:solidFill>
@@ -11369,48 +11569,70 @@
               <a:t>•  </a:t>
             </a:r>
             <a:r>
-              <a:rPr sz="1600" b="1" i="0">
-                <a:solidFill>
-                  <a:srgbClr val="11202B"/>
-                </a:solidFill>
-                <a:latin typeface="Malgun Gothic"/>
-                <a:ea typeface="Malgun Gothic"/>
-                <a:cs typeface="Malgun Gothic"/>
-              </a:rPr>
-              <a:t>두 호르몬은 쌍으로 작동한다.</a:t>
-            </a:r>
-            <a:r>
-              <a:rPr sz="1600" b="0" i="0">
-                <a:solidFill>
-                  <a:srgbClr val="11202B"/>
-                </a:solidFill>
-                <a:latin typeface="Malgun Gothic"/>
-                <a:ea typeface="Malgun Gothic"/>
-                <a:cs typeface="Malgun Gothic"/>
-              </a:rPr>
-              <a:t> 혈당 조절에서 의미 있는 것은 insulin/glucagon 비율이다. 식후에는 비율이 높아 저장 쪽으로, 공복에는 낮아 동원 쪽으로 기운다. 단백질만 많이 먹었을 때 두 호르몬이 </a:t>
-            </a:r>
-            <a:r>
-              <a:rPr sz="1600" b="1" i="0">
-                <a:solidFill>
-                  <a:srgbClr val="11202B"/>
-                </a:solidFill>
-                <a:latin typeface="Malgun Gothic"/>
-                <a:ea typeface="Malgun Gothic"/>
-                <a:cs typeface="Malgun Gothic"/>
-              </a:rPr>
-              <a:t>함께</a:t>
-            </a:r>
-            <a:r>
-              <a:rPr sz="1600" b="0" i="0">
-                <a:solidFill>
-                  <a:srgbClr val="11202B"/>
-                </a:solidFill>
-                <a:latin typeface="Malgun Gothic"/>
-                <a:ea typeface="Malgun Gothic"/>
-                <a:cs typeface="Malgun Gothic"/>
-              </a:rPr>
-              <a:t> 올라가는 현상이 비율 개념의 유용성을 보여 준다. Insulin만 올라가면 혈당이 떨어질 텐데, glucagon이 함께 올라가 간에서 포도당을 내보내므로 혈당이 유지되면서 아미노산만 조직으로 들어간다.</a:t>
+              <a:rPr sz="1400" b="1" i="0">
+                <a:solidFill>
+                  <a:srgbClr val="11202B"/>
+                </a:solidFill>
+                <a:latin typeface="Malgun Gothic"/>
+                <a:ea typeface="Malgun Gothic"/>
+                <a:cs typeface="Malgun Gothic"/>
+              </a:rPr>
+              <a:t>Glucagon.</a:t>
+            </a:r>
+            <a:r>
+              <a:rPr sz="1400" b="0" i="0">
+                <a:solidFill>
+                  <a:srgbClr val="11202B"/>
+                </a:solidFill>
+                <a:latin typeface="Malgun Gothic"/>
+                <a:ea typeface="Malgun Gothic"/>
+                <a:cs typeface="Malgun Gothic"/>
+              </a:rPr>
+              <a:t> 혈당이 떨어지면 α세포에서 분비된다. 신호는 "에너지가 모자란다"이며, 방향은 </a:t>
+            </a:r>
+            <a:r>
+              <a:rPr sz="1400" b="1" i="0">
+                <a:solidFill>
+                  <a:srgbClr val="11202B"/>
+                </a:solidFill>
+                <a:latin typeface="Malgun Gothic"/>
+                <a:ea typeface="Malgun Gothic"/>
+                <a:cs typeface="Malgun Gothic"/>
+              </a:rPr>
+              <a:t>동원</a:t>
+            </a:r>
+            <a:r>
+              <a:rPr sz="1400" b="0" i="0">
+                <a:solidFill>
+                  <a:srgbClr val="11202B"/>
+                </a:solidFill>
+                <a:latin typeface="Malgun Gothic"/>
+                <a:ea typeface="Malgun Gothic"/>
+                <a:cs typeface="Malgun Gothic"/>
+              </a:rPr>
+              <a:t>이다. 주 표적이 </a:t>
+            </a:r>
+            <a:r>
+              <a:rPr sz="1400" b="1" i="0">
+                <a:solidFill>
+                  <a:srgbClr val="11202B"/>
+                </a:solidFill>
+                <a:latin typeface="Malgun Gothic"/>
+                <a:ea typeface="Malgun Gothic"/>
+                <a:cs typeface="Malgun Gothic"/>
+              </a:rPr>
+              <a:t>간</a:t>
+            </a:r>
+            <a:r>
+              <a:rPr sz="1400" b="0" i="0">
+                <a:solidFill>
+                  <a:srgbClr val="11202B"/>
+                </a:solidFill>
+                <a:latin typeface="Malgun Gothic"/>
+                <a:ea typeface="Malgun Gothic"/>
+                <a:cs typeface="Malgun Gothic"/>
+              </a:rPr>
+              <a:t>이라는 점이 중요하다. Glycogen 분해와 gluconeogenesis를 켜고, ketone body 생산을 늘린다.</a:t>
             </a:r>
           </a:p>
           <a:p>
@@ -11420,7 +11642,7 @@
               </a:spcAft>
             </a:pPr>
             <a:r>
-              <a:rPr sz="1600" b="1" i="0">
+              <a:rPr sz="1400" b="1" i="0">
                 <a:solidFill>
                   <a:srgbClr val="F2B705"/>
                 </a:solidFill>
@@ -11431,7 +11653,69 @@
               <a:t>•  </a:t>
             </a:r>
             <a:r>
-              <a:rPr sz="1600" b="1" i="0">
+              <a:rPr sz="1400" b="1" i="0">
+                <a:solidFill>
+                  <a:srgbClr val="11202B"/>
+                </a:solidFill>
+                <a:latin typeface="Malgun Gothic"/>
+                <a:ea typeface="Malgun Gothic"/>
+                <a:cs typeface="Malgun Gothic"/>
+              </a:rPr>
+              <a:t>두 호르몬은 쌍으로 작동한다.</a:t>
+            </a:r>
+            <a:r>
+              <a:rPr sz="1400" b="0" i="0">
+                <a:solidFill>
+                  <a:srgbClr val="11202B"/>
+                </a:solidFill>
+                <a:latin typeface="Malgun Gothic"/>
+                <a:ea typeface="Malgun Gothic"/>
+                <a:cs typeface="Malgun Gothic"/>
+              </a:rPr>
+              <a:t> 혈당 조절에서 의미 있는 것은 insulin/glucagon 비율이다. 식후에는 비율이 높아 저장 쪽으로, 공복에는 낮아 동원 쪽으로 기운다. 단백질만 많이 먹었을 때 두 호르몬이 </a:t>
+            </a:r>
+            <a:r>
+              <a:rPr sz="1400" b="1" i="0">
+                <a:solidFill>
+                  <a:srgbClr val="11202B"/>
+                </a:solidFill>
+                <a:latin typeface="Malgun Gothic"/>
+                <a:ea typeface="Malgun Gothic"/>
+                <a:cs typeface="Malgun Gothic"/>
+              </a:rPr>
+              <a:t>함께</a:t>
+            </a:r>
+            <a:r>
+              <a:rPr sz="1400" b="0" i="0">
+                <a:solidFill>
+                  <a:srgbClr val="11202B"/>
+                </a:solidFill>
+                <a:latin typeface="Malgun Gothic"/>
+                <a:ea typeface="Malgun Gothic"/>
+                <a:cs typeface="Malgun Gothic"/>
+              </a:rPr>
+              <a:t> 올라가는 현상이 비율 개념의 유용성을 보여 준다. Insulin만 올라가면 혈당이 떨어질 텐데, glucagon이 함께 올라가 간에서 포도당을 내보내므로 혈당이 유지되면서 아미노산만 조직으로 들어간다.</a:t>
+            </a:r>
+          </a:p>
+          <a:p>
+            <a:pPr>
+              <a:spcAft>
+                <a:spcPts val="900"/>
+              </a:spcAft>
+            </a:pPr>
+            <a:r>
+              <a:rPr sz="1400" b="1" i="0">
+                <a:solidFill>
+                  <a:srgbClr val="F2B705"/>
+                </a:solidFill>
+                <a:latin typeface="Malgun Gothic"/>
+                <a:ea typeface="Malgun Gothic"/>
+                <a:cs typeface="Malgun Gothic"/>
+              </a:rPr>
+              <a:t>•  </a:t>
+            </a:r>
+            <a:r>
+              <a:rPr sz="1400" b="1" i="0">
                 <a:solidFill>
                   <a:srgbClr val="11202B"/>
                 </a:solidFill>
@@ -11442,7 +11726,7 @@
               <a:t>조절의 세 가지 시간 규모.</a:t>
             </a:r>
             <a:r>
-              <a:rPr sz="1600" b="0" i="0">
+              <a:rPr sz="1400" b="0" i="0">
                 <a:solidFill>
                   <a:srgbClr val="11202B"/>
                 </a:solidFill>
@@ -15387,6 +15671,57 @@
               <a:t>•  </a:t>
             </a:r>
             <a:r>
+              <a:rPr sz="1400" b="0" i="0">
+                <a:solidFill>
+                  <a:srgbClr val="11202B"/>
+                </a:solidFill>
+                <a:latin typeface="Malgun Gothic"/>
+                <a:ea typeface="Malgun Gothic"/>
+                <a:cs typeface="Malgun Gothic"/>
+              </a:rPr>
+              <a:t>앞 절에서 생물이 질서를 유지하려면 끊임없이 에너지를 들여야 한다고 했다. 그런데 음식에 든 에너지를 세포가 그대로 쓰지는 못한다. 중간에 </a:t>
+            </a:r>
+            <a:r>
+              <a:rPr sz="1400" b="1" i="0">
+                <a:solidFill>
+                  <a:srgbClr val="11202B"/>
+                </a:solidFill>
+                <a:latin typeface="Malgun Gothic"/>
+                <a:ea typeface="Malgun Gothic"/>
+                <a:cs typeface="Malgun Gothic"/>
+              </a:rPr>
+              <a:t>모든 세포가 공통으로 쓰는 형태</a:t>
+            </a:r>
+            <a:r>
+              <a:rPr sz="1400" b="0" i="0">
+                <a:solidFill>
+                  <a:srgbClr val="11202B"/>
+                </a:solidFill>
+                <a:latin typeface="Malgun Gothic"/>
+                <a:ea typeface="Malgun Gothic"/>
+                <a:cs typeface="Malgun Gothic"/>
+              </a:rPr>
+              <a:t>로 바꾸어 두어야 하고, 그 형태가 ATP다. 이 절은 왜 그런 중간 형태가 필요한지, 그리고 그것이 어떻게 일하는 데 쓰이는지를 세운다.</a:t>
+            </a:r>
+          </a:p>
+          <a:p>
+            <a:pPr>
+              <a:spcAft>
+                <a:spcPts val="900"/>
+              </a:spcAft>
+            </a:pPr>
+            <a:r>
+              <a:rPr sz="1400" b="1" i="0">
+                <a:solidFill>
+                  <a:srgbClr val="F2B705"/>
+                </a:solidFill>
+                <a:latin typeface="Malgun Gothic"/>
+                <a:ea typeface="Malgun Gothic"/>
+                <a:cs typeface="Malgun Gothic"/>
+              </a:rPr>
+              <a:t>•  </a:t>
+            </a:r>
+            <a:r>
               <a:rPr sz="1400" b="1" i="0">
                 <a:solidFill>
                   <a:srgbClr val="11202B"/>
@@ -16384,6 +16719,57 @@
             <a:spAutoFit/>
           </a:bodyPr>
           <a:lstStyle/>
+          <a:p>
+            <a:pPr>
+              <a:spcAft>
+                <a:spcPts val="900"/>
+              </a:spcAft>
+            </a:pPr>
+            <a:r>
+              <a:rPr sz="1400" b="1" i="0">
+                <a:solidFill>
+                  <a:srgbClr val="F2B705"/>
+                </a:solidFill>
+                <a:latin typeface="Malgun Gothic"/>
+                <a:ea typeface="Malgun Gothic"/>
+                <a:cs typeface="Malgun Gothic"/>
+              </a:rPr>
+              <a:t>•  </a:t>
+            </a:r>
+            <a:r>
+              <a:rPr sz="1400" b="0" i="0">
+                <a:solidFill>
+                  <a:srgbClr val="11202B"/>
+                </a:solidFill>
+                <a:latin typeface="Malgun Gothic"/>
+                <a:ea typeface="Malgun Gothic"/>
+                <a:cs typeface="Malgun Gothic"/>
+              </a:rPr>
+              <a:t>앞 절에서 ATP가 에너지의 통화라고 했다. 그러면 그 ATP는 무엇으로 만드는가. 거슬러 올라가면 </a:t>
+            </a:r>
+            <a:r>
+              <a:rPr sz="1400" b="1" i="0">
+                <a:solidFill>
+                  <a:srgbClr val="11202B"/>
+                </a:solidFill>
+                <a:latin typeface="Malgun Gothic"/>
+                <a:ea typeface="Malgun Gothic"/>
+                <a:cs typeface="Malgun Gothic"/>
+              </a:rPr>
+              <a:t>영양소에서 떼어 낸 전자</a:t>
+            </a:r>
+            <a:r>
+              <a:rPr sz="1400" b="0" i="0">
+                <a:solidFill>
+                  <a:srgbClr val="11202B"/>
+                </a:solidFill>
+                <a:latin typeface="Malgun Gothic"/>
+                <a:ea typeface="Malgun Gothic"/>
+                <a:cs typeface="Malgun Gothic"/>
+              </a:rPr>
+              <a:t>에 닿는다. 영양소를 태운다는 말의 화학적 실체가 바로 전자를 옮기는 일이며, 이 절은 그 과정을 다룬다.</a:t>
+            </a:r>
+          </a:p>
           <a:p>
             <a:pPr>
               <a:spcAft>
